--- a/public/kit/decks/session-ask-well-presenter.pptx
+++ b/public/kit/decks/session-ask-well-presenter.pptx
@@ -1760,7 +1760,7 @@
       </p:grpSpPr>
       <p:pic>
         <p:nvPicPr>
-          <p:cNvPr id="2" name="Image 0" descr="C:\Users\llino\AppData\Local\Temp\hfph-decks-hOWO7d\session-ask-well-title.jpg">    </p:cNvPr>
+          <p:cNvPr id="2" name="Image 0" descr="C:\Users\DEVELO~1\AppData\Local\Temp\hfph-decks-OLkhm9\session-ask-well-title.jpg">    </p:cNvPr>
           <p:cNvPicPr>
             <a:picLocks noChangeAspect="1"/>
           </p:cNvPicPr>
@@ -1809,7 +1809,7 @@
       </p:grpSpPr>
       <p:pic>
         <p:nvPicPr>
-          <p:cNvPr id="2" name="Image 0" descr="C:\Users\llino\AppData\Local\Temp\hfph-decks-hOWO7d\session-ask-well-next.jpg">    </p:cNvPr>
+          <p:cNvPr id="2" name="Image 0" descr="C:\Users\DEVELO~1\AppData\Local\Temp\hfph-decks-OLkhm9\session-ask-well-next.jpg">    </p:cNvPr>
           <p:cNvPicPr>
             <a:picLocks noChangeAspect="1"/>
           </p:cNvPicPr>
@@ -1858,7 +1858,7 @@
       </p:grpSpPr>
       <p:pic>
         <p:nvPicPr>
-          <p:cNvPr id="2" name="Image 0" descr="C:\Users\llino\AppData\Local\Temp\hfph-decks-hOWO7d\session-ask-well-licence.jpg">    </p:cNvPr>
+          <p:cNvPr id="2" name="Image 0" descr="C:\Users\DEVELO~1\AppData\Local\Temp\hfph-decks-OLkhm9\session-ask-well-licence.jpg">    </p:cNvPr>
           <p:cNvPicPr>
             <a:picLocks noChangeAspect="1"/>
           </p:cNvPicPr>
@@ -1907,7 +1907,7 @@
       </p:grpSpPr>
       <p:pic>
         <p:nvPicPr>
-          <p:cNvPr id="2" name="Image 0" descr="C:\Users\llino\AppData\Local\Temp\hfph-decks-hOWO7d\session-ask-well-why.jpg">    </p:cNvPr>
+          <p:cNvPr id="2" name="Image 0" descr="C:\Users\DEVELO~1\AppData\Local\Temp\hfph-decks-OLkhm9\session-ask-well-why.jpg">    </p:cNvPr>
           <p:cNvPicPr>
             <a:picLocks noChangeAspect="1"/>
           </p:cNvPicPr>
@@ -1956,7 +1956,7 @@
       </p:grpSpPr>
       <p:pic>
         <p:nvPicPr>
-          <p:cNvPr id="2" name="Image 0" descr="C:\Users\llino\AppData\Local\Temp\hfph-decks-hOWO7d\session-ask-well-method.jpg">    </p:cNvPr>
+          <p:cNvPr id="2" name="Image 0" descr="C:\Users\DEVELO~1\AppData\Local\Temp\hfph-decks-OLkhm9\session-ask-well-method.jpg">    </p:cNvPr>
           <p:cNvPicPr>
             <a:picLocks noChangeAspect="1"/>
           </p:cNvPicPr>
@@ -2005,7 +2005,7 @@
       </p:grpSpPr>
       <p:pic>
         <p:nvPicPr>
-          <p:cNvPr id="2" name="Image 0" descr="C:\Users\llino\AppData\Local\Temp\hfph-decks-hOWO7d\session-ask-well-clock.jpg">    </p:cNvPr>
+          <p:cNvPr id="2" name="Image 0" descr="C:\Users\DEVELO~1\AppData\Local\Temp\hfph-decks-OLkhm9\session-ask-well-clock.jpg">    </p:cNvPr>
           <p:cNvPicPr>
             <a:picLocks noChangeAspect="1"/>
           </p:cNvPicPr>
@@ -2054,7 +2054,7 @@
       </p:grpSpPr>
       <p:pic>
         <p:nvPicPr>
-          <p:cNvPr id="2" name="Image 0" descr="C:\Users\llino\AppData\Local\Temp\hfph-decks-hOWO7d\session-ask-well-brief.jpg">    </p:cNvPr>
+          <p:cNvPr id="2" name="Image 0" descr="C:\Users\DEVELO~1\AppData\Local\Temp\hfph-decks-OLkhm9\session-ask-well-brief.jpg">    </p:cNvPr>
           <p:cNvPicPr>
             <a:picLocks noChangeAspect="1"/>
           </p:cNvPicPr>
@@ -2103,7 +2103,7 @@
       </p:grpSpPr>
       <p:pic>
         <p:nvPicPr>
-          <p:cNvPr id="2" name="Image 0" descr="C:\Users\llino\AppData\Local\Temp\hfph-decks-hOWO7d\session-ask-well-drill.jpg">    </p:cNvPr>
+          <p:cNvPr id="2" name="Image 0" descr="C:\Users\DEVELO~1\AppData\Local\Temp\hfph-decks-OLkhm9\session-ask-well-drill.jpg">    </p:cNvPr>
           <p:cNvPicPr>
             <a:picLocks noChangeAspect="1"/>
           </p:cNvPicPr>
@@ -2152,7 +2152,7 @@
       </p:grpSpPr>
       <p:pic>
         <p:nvPicPr>
-          <p:cNvPr id="2" name="Image 0" descr="C:\Users\llino\AppData\Local\Temp\hfph-decks-hOWO7d\session-ask-well-debrief.jpg">    </p:cNvPr>
+          <p:cNvPr id="2" name="Image 0" descr="C:\Users\DEVELO~1\AppData\Local\Temp\hfph-decks-OLkhm9\session-ask-well-debrief.jpg">    </p:cNvPr>
           <p:cNvPicPr>
             <a:picLocks noChangeAspect="1"/>
           </p:cNvPicPr>
@@ -2201,7 +2201,7 @@
       </p:grpSpPr>
       <p:pic>
         <p:nvPicPr>
-          <p:cNvPr id="2" name="Image 0" descr="C:\Users\llino\AppData\Local\Temp\hfph-decks-hOWO7d\session-ask-well-mistakes.jpg">    </p:cNvPr>
+          <p:cNvPr id="2" name="Image 0" descr="C:\Users\DEVELO~1\AppData\Local\Temp\hfph-decks-OLkhm9\session-ask-well-mistakes.jpg">    </p:cNvPr>
           <p:cNvPicPr>
             <a:picLocks noChangeAspect="1"/>
           </p:cNvPicPr>
@@ -2250,7 +2250,7 @@
       </p:grpSpPr>
       <p:pic>
         <p:nvPicPr>
-          <p:cNvPr id="2" name="Image 0" descr="C:\Users\llino\AppData\Local\Temp\hfph-decks-hOWO7d\session-ask-well-take-home.jpg">    </p:cNvPr>
+          <p:cNvPr id="2" name="Image 0" descr="C:\Users\DEVELO~1\AppData\Local\Temp\hfph-decks-OLkhm9\session-ask-well-take-home.jpg">    </p:cNvPr>
           <p:cNvPicPr>
             <a:picLocks noChangeAspect="1"/>
           </p:cNvPicPr>
